--- a/Academic Documents/Powerpoint wkg/Mid project Update - Sam v1 10-09.pptx
+++ b/Academic Documents/Powerpoint wkg/Mid project Update - Sam v1 10-09.pptx
@@ -308,7 +308,7 @@
           <a:p>
             <a:fld id="{82AFC869-5EEF-42A8-8244-0DD91ADCD842}" type="datetimeFigureOut">
               <a:rPr lang="en-NZ" smtClean="0"/>
-              <a:t>12/09/2026</a:t>
+              <a:t>14/09/2026</a:t>
             </a:fld>
             <a:endParaRPr lang="en-NZ"/>
           </a:p>
@@ -583,7 +583,7 @@
           <a:p>
             <a:fld id="{82AFC869-5EEF-42A8-8244-0DD91ADCD842}" type="datetimeFigureOut">
               <a:rPr lang="en-NZ" smtClean="0"/>
-              <a:t>12/09/2026</a:t>
+              <a:t>14/09/2026</a:t>
             </a:fld>
             <a:endParaRPr lang="en-NZ"/>
           </a:p>
@@ -777,7 +777,7 @@
           <a:p>
             <a:fld id="{82AFC869-5EEF-42A8-8244-0DD91ADCD842}" type="datetimeFigureOut">
               <a:rPr lang="en-NZ" smtClean="0"/>
-              <a:t>12/09/2026</a:t>
+              <a:t>14/09/2026</a:t>
             </a:fld>
             <a:endParaRPr lang="en-NZ"/>
           </a:p>
@@ -1050,7 +1050,7 @@
           <a:p>
             <a:fld id="{82AFC869-5EEF-42A8-8244-0DD91ADCD842}" type="datetimeFigureOut">
               <a:rPr lang="en-NZ" smtClean="0"/>
-              <a:t>12/09/2026</a:t>
+              <a:t>14/09/2026</a:t>
             </a:fld>
             <a:endParaRPr lang="en-NZ"/>
           </a:p>
@@ -1391,7 +1391,7 @@
           <a:p>
             <a:fld id="{82AFC869-5EEF-42A8-8244-0DD91ADCD842}" type="datetimeFigureOut">
               <a:rPr lang="en-NZ" smtClean="0"/>
-              <a:t>12/09/2026</a:t>
+              <a:t>14/09/2026</a:t>
             </a:fld>
             <a:endParaRPr lang="en-NZ"/>
           </a:p>
@@ -2014,7 +2014,7 @@
           <a:p>
             <a:fld id="{82AFC869-5EEF-42A8-8244-0DD91ADCD842}" type="datetimeFigureOut">
               <a:rPr lang="en-NZ" smtClean="0"/>
-              <a:t>12/09/2026</a:t>
+              <a:t>14/09/2026</a:t>
             </a:fld>
             <a:endParaRPr lang="en-NZ"/>
           </a:p>
@@ -2874,7 +2874,7 @@
           <a:p>
             <a:fld id="{82AFC869-5EEF-42A8-8244-0DD91ADCD842}" type="datetimeFigureOut">
               <a:rPr lang="en-NZ" smtClean="0"/>
-              <a:t>12/09/2026</a:t>
+              <a:t>14/09/2026</a:t>
             </a:fld>
             <a:endParaRPr lang="en-NZ"/>
           </a:p>
@@ -3044,7 +3044,7 @@
           <a:p>
             <a:fld id="{82AFC869-5EEF-42A8-8244-0DD91ADCD842}" type="datetimeFigureOut">
               <a:rPr lang="en-NZ" smtClean="0"/>
-              <a:t>12/09/2026</a:t>
+              <a:t>14/09/2026</a:t>
             </a:fld>
             <a:endParaRPr lang="en-NZ"/>
           </a:p>
@@ -3224,7 +3224,7 @@
           <a:p>
             <a:fld id="{82AFC869-5EEF-42A8-8244-0DD91ADCD842}" type="datetimeFigureOut">
               <a:rPr lang="en-NZ" smtClean="0"/>
-              <a:t>12/09/2026</a:t>
+              <a:t>14/09/2026</a:t>
             </a:fld>
             <a:endParaRPr lang="en-NZ"/>
           </a:p>
@@ -3394,7 +3394,7 @@
           <a:p>
             <a:fld id="{82AFC869-5EEF-42A8-8244-0DD91ADCD842}" type="datetimeFigureOut">
               <a:rPr lang="en-NZ" smtClean="0"/>
-              <a:t>12/09/2026</a:t>
+              <a:t>14/09/2026</a:t>
             </a:fld>
             <a:endParaRPr lang="en-NZ"/>
           </a:p>
@@ -3641,7 +3641,7 @@
           <a:p>
             <a:fld id="{82AFC869-5EEF-42A8-8244-0DD91ADCD842}" type="datetimeFigureOut">
               <a:rPr lang="en-NZ" smtClean="0"/>
-              <a:t>12/09/2026</a:t>
+              <a:t>14/09/2026</a:t>
             </a:fld>
             <a:endParaRPr lang="en-NZ"/>
           </a:p>
@@ -3933,7 +3933,7 @@
           <a:p>
             <a:fld id="{82AFC869-5EEF-42A8-8244-0DD91ADCD842}" type="datetimeFigureOut">
               <a:rPr lang="en-NZ" smtClean="0"/>
-              <a:t>12/09/2026</a:t>
+              <a:t>14/09/2026</a:t>
             </a:fld>
             <a:endParaRPr lang="en-NZ"/>
           </a:p>
@@ -4377,7 +4377,7 @@
           <a:p>
             <a:fld id="{82AFC869-5EEF-42A8-8244-0DD91ADCD842}" type="datetimeFigureOut">
               <a:rPr lang="en-NZ" smtClean="0"/>
-              <a:t>12/09/2026</a:t>
+              <a:t>14/09/2026</a:t>
             </a:fld>
             <a:endParaRPr lang="en-NZ"/>
           </a:p>
@@ -4495,7 +4495,7 @@
           <a:p>
             <a:fld id="{82AFC869-5EEF-42A8-8244-0DD91ADCD842}" type="datetimeFigureOut">
               <a:rPr lang="en-NZ" smtClean="0"/>
-              <a:t>12/09/2026</a:t>
+              <a:t>14/09/2026</a:t>
             </a:fld>
             <a:endParaRPr lang="en-NZ"/>
           </a:p>
@@ -4590,7 +4590,7 @@
           <a:p>
             <a:fld id="{82AFC869-5EEF-42A8-8244-0DD91ADCD842}" type="datetimeFigureOut">
               <a:rPr lang="en-NZ" smtClean="0"/>
-              <a:t>12/09/2026</a:t>
+              <a:t>14/09/2026</a:t>
             </a:fld>
             <a:endParaRPr lang="en-NZ"/>
           </a:p>
@@ -4869,7 +4869,7 @@
           <a:p>
             <a:fld id="{82AFC869-5EEF-42A8-8244-0DD91ADCD842}" type="datetimeFigureOut">
               <a:rPr lang="en-NZ" smtClean="0"/>
-              <a:t>12/09/2026</a:t>
+              <a:t>14/09/2026</a:t>
             </a:fld>
             <a:endParaRPr lang="en-NZ"/>
           </a:p>
@@ -5144,7 +5144,7 @@
           <a:p>
             <a:fld id="{82AFC869-5EEF-42A8-8244-0DD91ADCD842}" type="datetimeFigureOut">
               <a:rPr lang="en-NZ" smtClean="0"/>
-              <a:t>12/09/2026</a:t>
+              <a:t>14/09/2026</a:t>
             </a:fld>
             <a:endParaRPr lang="en-NZ"/>
           </a:p>
@@ -5587,7 +5587,7 @@
           <a:p>
             <a:fld id="{82AFC869-5EEF-42A8-8244-0DD91ADCD842}" type="datetimeFigureOut">
               <a:rPr lang="en-NZ" smtClean="0"/>
-              <a:t>12/09/2026</a:t>
+              <a:t>14/09/2026</a:t>
             </a:fld>
             <a:endParaRPr lang="en-NZ"/>
           </a:p>
@@ -6926,7 +6926,7 @@
               <a:rPr lang="en-NZ" dirty="0">
                 <a:latin typeface="Century Gothic" panose="020B0502020202020204" pitchFamily="34" charset="0"/>
               </a:rPr>
-              <a:t>Any changes to timeframes that need to be discussed?</a:t>
+              <a:t>Any changes to timeframes that need to be discussed</a:t>
             </a:r>
           </a:p>
           <a:p>
